--- a/classes/parte-1-redes-y-seguridad-de-redes/036-vpn-y-tuneles-ipsec-wireguard-y-openvpn/clase-036-presentacion.pptx
+++ b/classes/parte-1-redes-y-seguridad-de-redes/036-vpn-y-tuneles-ipsec-wireguard-y-openvpn/clase-036-presentacion.pptx
@@ -18,6 +18,9 @@
     <p:sldId id="266" r:id="rId17"/>
     <p:sldId id="267" r:id="rId18"/>
     <p:sldId id="268" r:id="rId19"/>
+    <p:sldId id="269" r:id="rId20"/>
+    <p:sldId id="270" r:id="rId21"/>
+    <p:sldId id="271" r:id="rId22"/>
   </p:sldIdLst>
   <p:sldSz cx="9144000" cy="6858000" type="screen4x3"/>
   <p:notesSz cx="6858000" cy="9144000"/>
@@ -3199,7 +3202,7 @@
                   <a:srgbClr val="0B3D2E"/>
                 </a:solidFill>
               </a:rPr>
-              <a:t>📝 Reto verificable</a:t>
+              <a:t>🧪 Laboratorio guiado — OpenVPN e IPsec</a:t>
             </a:r>
           </a:p>
         </p:txBody>
@@ -3237,22 +3240,37 @@
                   <a:srgbClr val="22282E"/>
                 </a:solidFill>
               </a:rPr>
-              <a:t>•  Despliega un túnel funcional (WireGuard u OpenVPN) entre dos VMs de laboratorio en subredes distintas, de modo que puedan alcanzarse por la IP interna del túnel. Entrega: los archivos de configuración (sin claves privadas), la salida de wg show/estado de OpenVPN, y una captura de tcpdump en la interfaz física que demuestre que el tráfico va cifrado.</a:t>
-            </a:r>
-          </a:p>
-          <a:p>
-            <a:pPr>
-              <a:spcAft>
-                <a:spcPts val="600"/>
-              </a:spcAft>
-            </a:pPr>
-            <a:r>
-              <a:rPr sz="1500">
-                <a:solidFill>
-                  <a:srgbClr val="22282E"/>
-                </a:solidFill>
-              </a:rPr>
-              <a:t>•  Criterio de aceptación: el ping entre IPs internas funciona, la captura en la interfaz física no muestra el contenido en claro, y las claves privadas tienen permisos 600 (nunca incluidas en la entrega).</a:t>
+              <a:t>•  OpenVPN — PKI mínima con easy-rsa:</a:t>
+            </a:r>
+          </a:p>
+          <a:p>
+            <a:pPr>
+              <a:spcAft>
+                <a:spcPts val="600"/>
+              </a:spcAft>
+            </a:pPr>
+            <a:r>
+              <a:rPr sz="1500">
+                <a:solidFill>
+                  <a:srgbClr val="22282E"/>
+                </a:solidFill>
+              </a:rPr>
+              <a:t>•  Configura server.conf (puerto 1194/udp, dev tun, cifrado AES-GCM) y arranca sudo openvpn --config server.conf.</a:t>
+            </a:r>
+          </a:p>
+          <a:p>
+            <a:pPr>
+              <a:spcAft>
+                <a:spcPts val="600"/>
+              </a:spcAft>
+            </a:pPr>
+            <a:r>
+              <a:rPr sz="1500">
+                <a:solidFill>
+                  <a:srgbClr val="22282E"/>
+                </a:solidFill>
+              </a:rPr>
+              <a:t>•  IPsec con strongSwan (site-to-site, esquema): edita /etc/ipsec.conf con ikev2, esp=aes256-sha256, define leftsubnet/rightsubnet, y levanta con sudo ipsec up &lt;conexion&gt;.</a:t>
             </a:r>
           </a:p>
         </p:txBody>
@@ -3303,7 +3321,7 @@
                   <a:srgbClr val="0B3D2E"/>
                 </a:solidFill>
               </a:rPr>
-              <a:t>⚠️ Errores comunes</a:t>
+              <a:t>✍️ Ejercicios</a:t>
             </a:r>
           </a:p>
         </p:txBody>
@@ -3341,67 +3359,82 @@
                   <a:srgbClr val="22282E"/>
                 </a:solidFill>
               </a:rPr>
-              <a:t>•  WireGuard no pasa tráfico — AllowedIPs mal definido o falta habilitar ipforward; revisa rutas y sysctl net.ipv4.ipforward=1</a:t>
-            </a:r>
-          </a:p>
-          <a:p>
-            <a:pPr>
-              <a:spcAft>
-                <a:spcPts val="600"/>
-              </a:spcAft>
-            </a:pPr>
-            <a:r>
-              <a:rPr sz="1500">
-                <a:solidFill>
-                  <a:srgbClr val="22282E"/>
-                </a:solidFill>
-              </a:rPr>
-              <a:t>•  "handshake did not complete" — Clave pública equivocada, reloj desincronizado o firewall bloquea el puerto UDP</a:t>
-            </a:r>
-          </a:p>
-          <a:p>
-            <a:pPr>
-              <a:spcAft>
-                <a:spcPts val="600"/>
-              </a:spcAft>
-            </a:pPr>
-            <a:r>
-              <a:rPr sz="1500">
-                <a:solidFill>
-                  <a:srgbClr val="22282E"/>
-                </a:solidFill>
-              </a:rPr>
-              <a:t>•  OpenVPN "TLS handshake failed" — Certificados mal generados o CA no confiable; regenera la PKI</a:t>
-            </a:r>
-          </a:p>
-          <a:p>
-            <a:pPr>
-              <a:spcAft>
-                <a:spcPts val="600"/>
-              </a:spcAft>
-            </a:pPr>
-            <a:r>
-              <a:rPr sz="1500">
-                <a:solidFill>
-                  <a:srgbClr val="22282E"/>
-                </a:solidFill>
-              </a:rPr>
-              <a:t>•  El túnel sube pero no hay conectividad — Falta NAT/masquerade en el servidor o firewall bloquea el tun; añade regla POSTROUTING</a:t>
-            </a:r>
-          </a:p>
-          <a:p>
-            <a:pPr>
-              <a:spcAft>
-                <a:spcPts val="600"/>
-              </a:spcAft>
-            </a:pPr>
-            <a:r>
-              <a:rPr sz="1500">
-                <a:solidFill>
-                  <a:srgbClr val="22282E"/>
-                </a:solidFill>
-              </a:rPr>
-              <a:t>•  IPsec no cifra la subred esperada — leftsubnet/rightsubnet incorrectos; ajusta las políticas de tráfico</a:t>
+              <a:t>•  Monta un túnel WireGuard entre dos VMs y demuestra con tcpdump que el tráfico interno viaja cifrado.</a:t>
+            </a:r>
+          </a:p>
+          <a:p>
+            <a:pPr>
+              <a:spcAft>
+                <a:spcPts val="600"/>
+              </a:spcAft>
+            </a:pPr>
+            <a:r>
+              <a:rPr sz="1500">
+                <a:solidFill>
+                  <a:srgbClr val="22282E"/>
+                </a:solidFill>
+              </a:rPr>
+              <a:t>•  Configura split tunnel en WireGuard para que solo una subred concreta pase por la VPN.</a:t>
+            </a:r>
+          </a:p>
+          <a:p>
+            <a:pPr>
+              <a:spcAft>
+                <a:spcPts val="600"/>
+              </a:spcAft>
+            </a:pPr>
+            <a:r>
+              <a:rPr sz="1500">
+                <a:solidFill>
+                  <a:srgbClr val="22282E"/>
+                </a:solidFill>
+              </a:rPr>
+              <a:t>•  Con OpenVPN, revoca un certificado de cliente y verifica que ya no puede conectar (CRL).</a:t>
+            </a:r>
+          </a:p>
+          <a:p>
+            <a:pPr>
+              <a:spcAft>
+                <a:spcPts val="600"/>
+              </a:spcAft>
+            </a:pPr>
+            <a:r>
+              <a:rPr sz="1500">
+                <a:solidFill>
+                  <a:srgbClr val="22282E"/>
+                </a:solidFill>
+              </a:rPr>
+              <a:t>•  Compara el tamaño de la configuración y el handshake de WireGuard vs. OpenVPN.</a:t>
+            </a:r>
+          </a:p>
+          <a:p>
+            <a:pPr>
+              <a:spcAft>
+                <a:spcPts val="600"/>
+              </a:spcAft>
+            </a:pPr>
+            <a:r>
+              <a:rPr sz="1500">
+                <a:solidFill>
+                  <a:srgbClr val="22282E"/>
+                </a:solidFill>
+              </a:rPr>
+              <a:t>•  Explica, capturando con Wireshark, las fases IKE de una negociación IPsec.</a:t>
+            </a:r>
+          </a:p>
+          <a:p>
+            <a:pPr>
+              <a:spcAft>
+                <a:spcPts val="600"/>
+              </a:spcAft>
+            </a:pPr>
+            <a:r>
+              <a:rPr sz="1500">
+                <a:solidFill>
+                  <a:srgbClr val="22282E"/>
+                </a:solidFill>
+              </a:rPr>
+              <a:t>•  Aplica un firewall (clase 034) que solo permita el puerto de la VPN y bloquee el resto.</a:t>
             </a:r>
           </a:p>
         </p:txBody>
@@ -3452,7 +3485,7 @@
                   <a:srgbClr val="0B3D2E"/>
                 </a:solidFill>
               </a:rPr>
-              <a:t>❓ Preguntas frecuentes</a:t>
+              <a:t>📝 Reto verificable</a:t>
             </a:r>
           </a:p>
         </p:txBody>
@@ -3490,97 +3523,22 @@
                   <a:srgbClr val="22282E"/>
                 </a:solidFill>
               </a:rPr>
-              <a:t>•  ❓ ¿WireGuard o OpenVPN?</a:t>
-            </a:r>
-          </a:p>
-          <a:p>
-            <a:pPr>
-              <a:spcAft>
-                <a:spcPts val="600"/>
-              </a:spcAft>
-            </a:pPr>
-            <a:r>
-              <a:rPr sz="1500">
-                <a:solidFill>
-                  <a:srgbClr val="22282E"/>
-                </a:solidFill>
-              </a:rPr>
-              <a:t>•  WireGuard es más simple, rápido y con menor superficie de código; ideal para nuevos despliegues. OpenVPN es más flexible y compatible con entornos que exigen TCP/443 o autenticación por usuario. IPsec domina el site-to-site empresarial.</a:t>
-            </a:r>
-          </a:p>
-          <a:p>
-            <a:pPr>
-              <a:spcAft>
-                <a:spcPts val="600"/>
-              </a:spcAft>
-            </a:pPr>
-            <a:r>
-              <a:rPr sz="1500">
-                <a:solidFill>
-                  <a:srgbClr val="22282E"/>
-                </a:solidFill>
-              </a:rPr>
-              <a:t>•  ❓ ¿Una VPN me hace anónimo?</a:t>
-            </a:r>
-          </a:p>
-          <a:p>
-            <a:pPr>
-              <a:spcAft>
-                <a:spcPts val="600"/>
-              </a:spcAft>
-            </a:pPr>
-            <a:r>
-              <a:rPr sz="1500">
-                <a:solidFill>
-                  <a:srgbClr val="22282E"/>
-                </a:solidFill>
-              </a:rPr>
-              <a:t>•  No. Cifra el tráfico entre tus extremos y desplaza la confianza al proveedor de la VPN. No es anonimato; para eso hay otras herramientas y consideraciones.</a:t>
-            </a:r>
-          </a:p>
-          <a:p>
-            <a:pPr>
-              <a:spcAft>
-                <a:spcPts val="600"/>
-              </a:spcAft>
-            </a:pPr>
-            <a:r>
-              <a:rPr sz="1500">
-                <a:solidFill>
-                  <a:srgbClr val="22282E"/>
-                </a:solidFill>
-              </a:rPr>
-              <a:t>•  ❓ ¿Qué es un split tunnel?</a:t>
-            </a:r>
-          </a:p>
-          <a:p>
-            <a:pPr>
-              <a:spcAft>
-                <a:spcPts val="600"/>
-              </a:spcAft>
-            </a:pPr>
-            <a:r>
-              <a:rPr sz="1500">
-                <a:solidFill>
-                  <a:srgbClr val="22282E"/>
-                </a:solidFill>
-              </a:rPr>
-              <a:t>•  Configuración donde solo parte del tráfico (ciertas subredes) va por la VPN y el resto sale directo. Se controla con las rutas y AllowedIPs.</a:t>
-            </a:r>
-          </a:p>
-          <a:p>
-            <a:pPr>
-              <a:spcAft>
-                <a:spcPts val="600"/>
-              </a:spcAft>
-            </a:pPr>
-            <a:r>
-              <a:rPr sz="1500">
-                <a:solidFill>
-                  <a:srgbClr val="22282E"/>
-                </a:solidFill>
-              </a:rPr>
-              <a:t>•  ❓ ¿Por qué importa PFS?</a:t>
+              <a:t>•  Despliega un túnel funcional (WireGuard u OpenVPN) entre dos VMs de laboratorio en subredes distintas, de modo que puedan alcanzarse por la IP interna del túnel. Entrega: los archivos de…</a:t>
+            </a:r>
+          </a:p>
+          <a:p>
+            <a:pPr>
+              <a:spcAft>
+                <a:spcPts val="600"/>
+              </a:spcAft>
+            </a:pPr>
+            <a:r>
+              <a:rPr sz="1500">
+                <a:solidFill>
+                  <a:srgbClr val="22282E"/>
+                </a:solidFill>
+              </a:rPr>
+              <a:t>•  Criterio de aceptación: el ping entre IPs internas funciona, la captura en la interfaz física no muestra el contenido en claro, y las claves privadas tienen permisos 600 (nunca incluidas en la…</a:t>
             </a:r>
           </a:p>
         </p:txBody>
@@ -3631,7 +3589,7 @@
                   <a:srgbClr val="0B3D2E"/>
                 </a:solidFill>
               </a:rPr>
-              <a:t>🔗 Referencias</a:t>
+              <a:t>⚠️ Errores comunes</a:t>
             </a:r>
           </a:p>
         </p:txBody>
@@ -3669,6 +3627,334 @@
                   <a:srgbClr val="22282E"/>
                 </a:solidFill>
               </a:rPr>
+              <a:t>•  WireGuard no pasa tráfico — AllowedIPs mal definido o falta habilitar ipforward; revisa rutas y sysctl net.ipv4.ipforward=1</a:t>
+            </a:r>
+          </a:p>
+          <a:p>
+            <a:pPr>
+              <a:spcAft>
+                <a:spcPts val="600"/>
+              </a:spcAft>
+            </a:pPr>
+            <a:r>
+              <a:rPr sz="1500">
+                <a:solidFill>
+                  <a:srgbClr val="22282E"/>
+                </a:solidFill>
+              </a:rPr>
+              <a:t>•  "handshake did not complete" — Clave pública equivocada, reloj desincronizado o firewall bloquea el puerto UDP</a:t>
+            </a:r>
+          </a:p>
+          <a:p>
+            <a:pPr>
+              <a:spcAft>
+                <a:spcPts val="600"/>
+              </a:spcAft>
+            </a:pPr>
+            <a:r>
+              <a:rPr sz="1500">
+                <a:solidFill>
+                  <a:srgbClr val="22282E"/>
+                </a:solidFill>
+              </a:rPr>
+              <a:t>•  OpenVPN "TLS handshake failed" — Certificados mal generados o CA no confiable; regenera la PKI</a:t>
+            </a:r>
+          </a:p>
+          <a:p>
+            <a:pPr>
+              <a:spcAft>
+                <a:spcPts val="600"/>
+              </a:spcAft>
+            </a:pPr>
+            <a:r>
+              <a:rPr sz="1500">
+                <a:solidFill>
+                  <a:srgbClr val="22282E"/>
+                </a:solidFill>
+              </a:rPr>
+              <a:t>•  El túnel sube pero no hay conectividad — Falta NAT/masquerade en el servidor o firewall bloquea el tun; añade regla POSTROUTING</a:t>
+            </a:r>
+          </a:p>
+          <a:p>
+            <a:pPr>
+              <a:spcAft>
+                <a:spcPts val="600"/>
+              </a:spcAft>
+            </a:pPr>
+            <a:r>
+              <a:rPr sz="1500">
+                <a:solidFill>
+                  <a:srgbClr val="22282E"/>
+                </a:solidFill>
+              </a:rPr>
+              <a:t>•  IPsec no cifra la subred esperada — leftsubnet/rightsubnet incorrectos; ajusta las políticas de tráfico</a:t>
+            </a:r>
+          </a:p>
+        </p:txBody>
+      </p:sp>
+    </p:spTree>
+  </p:cSld>
+  <p:clrMapOvr>
+    <a:masterClrMapping/>
+  </p:clrMapOvr>
+</p:sld>
+</file>
+
+<file path=ppt/slides/slide14.xml><?xml version="1.0" encoding="utf-8"?>
+<p:sld xmlns:a="http://schemas.openxmlformats.org/drawingml/2006/main" xmlns:p="http://schemas.openxmlformats.org/presentationml/2006/main" xmlns:r="http://schemas.openxmlformats.org/officeDocument/2006/relationships">
+  <p:cSld>
+    <p:spTree>
+      <p:nvGrpSpPr>
+        <p:cNvPr id="1" name=""/>
+        <p:cNvGrpSpPr/>
+        <p:nvPr/>
+      </p:nvGrpSpPr>
+      <p:grpSpPr/>
+      <p:sp>
+        <p:nvSpPr>
+          <p:cNvPr id="2" name="TextBox 1"/>
+          <p:cNvSpPr txBox="1"/>
+          <p:nvPr/>
+        </p:nvSpPr>
+        <p:spPr>
+          <a:xfrm>
+            <a:off x="457200" y="320040"/>
+            <a:ext cx="8229600" cy="822960"/>
+          </a:xfrm>
+          <a:prstGeom prst="rect">
+            <a:avLst/>
+          </a:prstGeom>
+          <a:noFill/>
+        </p:spPr>
+        <p:txBody>
+          <a:bodyPr wrap="square">
+            <a:spAutoFit/>
+          </a:bodyPr>
+          <a:lstStyle/>
+          <a:p>
+            <a:r>
+              <a:rPr sz="2600" b="1">
+                <a:solidFill>
+                  <a:srgbClr val="0B3D2E"/>
+                </a:solidFill>
+              </a:rPr>
+              <a:t>❓ Preguntas frecuentes</a:t>
+            </a:r>
+          </a:p>
+        </p:txBody>
+      </p:sp>
+      <p:sp>
+        <p:nvSpPr>
+          <p:cNvPr id="3" name="TextBox 2"/>
+          <p:cNvSpPr txBox="1"/>
+          <p:nvPr/>
+        </p:nvSpPr>
+        <p:spPr>
+          <a:xfrm>
+            <a:off x="457200" y="1280160"/>
+            <a:ext cx="8229600" cy="4937760"/>
+          </a:xfrm>
+          <a:prstGeom prst="rect">
+            <a:avLst/>
+          </a:prstGeom>
+          <a:noFill/>
+        </p:spPr>
+        <p:txBody>
+          <a:bodyPr wrap="square">
+            <a:spAutoFit/>
+          </a:bodyPr>
+          <a:lstStyle/>
+          <a:p>
+            <a:pPr>
+              <a:spcAft>
+                <a:spcPts val="600"/>
+              </a:spcAft>
+            </a:pPr>
+            <a:r>
+              <a:rPr sz="1500">
+                <a:solidFill>
+                  <a:srgbClr val="22282E"/>
+                </a:solidFill>
+              </a:rPr>
+              <a:t>•  ❓ ¿WireGuard o OpenVPN?</a:t>
+            </a:r>
+          </a:p>
+          <a:p>
+            <a:pPr>
+              <a:spcAft>
+                <a:spcPts val="600"/>
+              </a:spcAft>
+            </a:pPr>
+            <a:r>
+              <a:rPr sz="1500">
+                <a:solidFill>
+                  <a:srgbClr val="22282E"/>
+                </a:solidFill>
+              </a:rPr>
+              <a:t>•  WireGuard es más simple, rápido y con menor superficie de código; ideal para nuevos despliegues. OpenVPN es más flexible y compatible con entornos que exigen TCP/443 o autenticación por usuario.…</a:t>
+            </a:r>
+          </a:p>
+          <a:p>
+            <a:pPr>
+              <a:spcAft>
+                <a:spcPts val="600"/>
+              </a:spcAft>
+            </a:pPr>
+            <a:r>
+              <a:rPr sz="1500">
+                <a:solidFill>
+                  <a:srgbClr val="22282E"/>
+                </a:solidFill>
+              </a:rPr>
+              <a:t>•  ❓ ¿Una VPN me hace anónimo?</a:t>
+            </a:r>
+          </a:p>
+          <a:p>
+            <a:pPr>
+              <a:spcAft>
+                <a:spcPts val="600"/>
+              </a:spcAft>
+            </a:pPr>
+            <a:r>
+              <a:rPr sz="1500">
+                <a:solidFill>
+                  <a:srgbClr val="22282E"/>
+                </a:solidFill>
+              </a:rPr>
+              <a:t>•  No. Cifra el tráfico entre tus extremos y desplaza la confianza al proveedor de la VPN. No es anonimato; para eso hay otras herramientas y consideraciones.</a:t>
+            </a:r>
+          </a:p>
+          <a:p>
+            <a:pPr>
+              <a:spcAft>
+                <a:spcPts val="600"/>
+              </a:spcAft>
+            </a:pPr>
+            <a:r>
+              <a:rPr sz="1500">
+                <a:solidFill>
+                  <a:srgbClr val="22282E"/>
+                </a:solidFill>
+              </a:rPr>
+              <a:t>•  ❓ ¿Qué es un split tunnel?</a:t>
+            </a:r>
+          </a:p>
+          <a:p>
+            <a:pPr>
+              <a:spcAft>
+                <a:spcPts val="600"/>
+              </a:spcAft>
+            </a:pPr>
+            <a:r>
+              <a:rPr sz="1500">
+                <a:solidFill>
+                  <a:srgbClr val="22282E"/>
+                </a:solidFill>
+              </a:rPr>
+              <a:t>•  Configuración donde solo parte del tráfico (ciertas subredes) va por la VPN y el resto sale directo. Se controla con las rutas y AllowedIPs.</a:t>
+            </a:r>
+          </a:p>
+          <a:p>
+            <a:pPr>
+              <a:spcAft>
+                <a:spcPts val="600"/>
+              </a:spcAft>
+            </a:pPr>
+            <a:r>
+              <a:rPr sz="1500">
+                <a:solidFill>
+                  <a:srgbClr val="22282E"/>
+                </a:solidFill>
+              </a:rPr>
+              <a:t>•  ❓ ¿Por qué importa PFS?</a:t>
+            </a:r>
+          </a:p>
+        </p:txBody>
+      </p:sp>
+    </p:spTree>
+  </p:cSld>
+  <p:clrMapOvr>
+    <a:masterClrMapping/>
+  </p:clrMapOvr>
+</p:sld>
+</file>
+
+<file path=ppt/slides/slide15.xml><?xml version="1.0" encoding="utf-8"?>
+<p:sld xmlns:a="http://schemas.openxmlformats.org/drawingml/2006/main" xmlns:p="http://schemas.openxmlformats.org/presentationml/2006/main" xmlns:r="http://schemas.openxmlformats.org/officeDocument/2006/relationships">
+  <p:cSld>
+    <p:spTree>
+      <p:nvGrpSpPr>
+        <p:cNvPr id="1" name=""/>
+        <p:cNvGrpSpPr/>
+        <p:nvPr/>
+      </p:nvGrpSpPr>
+      <p:grpSpPr/>
+      <p:sp>
+        <p:nvSpPr>
+          <p:cNvPr id="2" name="TextBox 1"/>
+          <p:cNvSpPr txBox="1"/>
+          <p:nvPr/>
+        </p:nvSpPr>
+        <p:spPr>
+          <a:xfrm>
+            <a:off x="457200" y="320040"/>
+            <a:ext cx="8229600" cy="822960"/>
+          </a:xfrm>
+          <a:prstGeom prst="rect">
+            <a:avLst/>
+          </a:prstGeom>
+          <a:noFill/>
+        </p:spPr>
+        <p:txBody>
+          <a:bodyPr wrap="square">
+            <a:spAutoFit/>
+          </a:bodyPr>
+          <a:lstStyle/>
+          <a:p>
+            <a:r>
+              <a:rPr sz="2600" b="1">
+                <a:solidFill>
+                  <a:srgbClr val="0B3D2E"/>
+                </a:solidFill>
+              </a:rPr>
+              <a:t>🔗 Referencias</a:t>
+            </a:r>
+          </a:p>
+        </p:txBody>
+      </p:sp>
+      <p:sp>
+        <p:nvSpPr>
+          <p:cNvPr id="3" name="TextBox 2"/>
+          <p:cNvSpPr txBox="1"/>
+          <p:nvPr/>
+        </p:nvSpPr>
+        <p:spPr>
+          <a:xfrm>
+            <a:off x="457200" y="1280160"/>
+            <a:ext cx="8229600" cy="4937760"/>
+          </a:xfrm>
+          <a:prstGeom prst="rect">
+            <a:avLst/>
+          </a:prstGeom>
+          <a:noFill/>
+        </p:spPr>
+        <p:txBody>
+          <a:bodyPr wrap="square">
+            <a:spAutoFit/>
+          </a:bodyPr>
+          <a:lstStyle/>
+          <a:p>
+            <a:pPr>
+              <a:spcAft>
+                <a:spcPts val="600"/>
+              </a:spcAft>
+            </a:pPr>
+            <a:r>
+              <a:rPr sz="1500">
+                <a:solidFill>
+                  <a:srgbClr val="22282E"/>
+                </a:solidFill>
+              </a:rPr>
               <a:t>•  WireGuard whitepaper y docs. &lt;https://www.wireguard.com/&gt;</a:t>
             </a:r>
           </a:p>
@@ -3719,6 +4005,81 @@
           </a:p>
         </p:txBody>
       </p:sp>
+    </p:spTree>
+  </p:cSld>
+  <p:clrMapOvr>
+    <a:masterClrMapping/>
+  </p:clrMapOvr>
+</p:sld>
+</file>
+
+<file path=ppt/slides/slide16.xml><?xml version="1.0" encoding="utf-8"?>
+<p:sld xmlns:a="http://schemas.openxmlformats.org/drawingml/2006/main" xmlns:p="http://schemas.openxmlformats.org/presentationml/2006/main" xmlns:r="http://schemas.openxmlformats.org/officeDocument/2006/relationships">
+  <p:cSld>
+    <p:spTree>
+      <p:nvGrpSpPr>
+        <p:cNvPr id="1" name=""/>
+        <p:cNvGrpSpPr/>
+        <p:nvPr/>
+      </p:nvGrpSpPr>
+      <p:grpSpPr/>
+      <p:sp>
+        <p:nvSpPr>
+          <p:cNvPr id="2" name="TextBox 1"/>
+          <p:cNvSpPr txBox="1"/>
+          <p:nvPr/>
+        </p:nvSpPr>
+        <p:spPr>
+          <a:xfrm>
+            <a:off x="457200" y="274320"/>
+            <a:ext cx="8229600" cy="640080"/>
+          </a:xfrm>
+          <a:prstGeom prst="rect">
+            <a:avLst/>
+          </a:prstGeom>
+          <a:noFill/>
+        </p:spPr>
+        <p:txBody>
+          <a:bodyPr wrap="square">
+            <a:spAutoFit/>
+          </a:bodyPr>
+          <a:lstStyle/>
+          <a:p>
+            <a:r>
+              <a:rPr sz="2200" b="1">
+                <a:solidFill>
+                  <a:srgbClr val="0B3D2E"/>
+                </a:solidFill>
+              </a:rPr>
+              <a:t>Diagrama de la clase</a:t>
+            </a:r>
+          </a:p>
+        </p:txBody>
+      </p:sp>
+      <p:pic>
+        <p:nvPicPr>
+          <p:cNvPr id="3" name="Picture 2" descr="e79fbc1b3809ecd0.png"/>
+          <p:cNvPicPr>
+            <a:picLocks noChangeAspect="1"/>
+          </p:cNvPicPr>
+          <p:nvPr/>
+        </p:nvPicPr>
+        <p:blipFill>
+          <a:blip r:embed="rId2"/>
+          <a:stretch>
+            <a:fillRect/>
+          </a:stretch>
+        </p:blipFill>
+        <p:spPr>
+          <a:xfrm>
+            <a:off x="457200" y="3255264"/>
+            <a:ext cx="8229600" cy="987552"/>
+          </a:xfrm>
+          <a:prstGeom prst="rect">
+            <a:avLst/>
+          </a:prstGeom>
+        </p:spPr>
+      </p:pic>
     </p:spTree>
   </p:cSld>
   <p:clrMapOvr>
@@ -3803,7 +4164,7 @@
                   <a:srgbClr val="22282E"/>
                 </a:solidFill>
               </a:rPr>
-              <a:t>•  Comprender cómo funcionan las redes privadas virtuales y los túneles cifrados, y configurar los tres más usados: WireGuard (moderno y simple), OpenVPN (flexible y probado) e IPsec (estándar para site-to-site). El alumno aprenderá a elegir la tecnología según el caso de uso y a desplegar un túnel funcional con parámetros seguros.</a:t>
+              <a:t>•  Comprender cómo funcionan las redes privadas virtuales y los túneles cifrados, y configurar los tres más usados: WireGuard (moderno y simple), OpenVPN (flexible y probado) e IPsec (estándar para…</a:t>
             </a:r>
           </a:p>
         </p:txBody>
@@ -4212,7 +4573,7 @@
                   <a:srgbClr val="0B3D2E"/>
                 </a:solidFill>
               </a:rPr>
-              <a:t>📖 Definiciones y características</a:t>
+              <a:t>🧠 Explicación en profundidad</a:t>
             </a:r>
           </a:p>
         </p:txBody>
@@ -4250,82 +4611,97 @@
                   <a:srgbClr val="22282E"/>
                 </a:solidFill>
               </a:rPr>
-              <a:t>•  Túnel: encapsulación de paquetes dentro de otros para atravesar una red intermedia, normalmente cifrando la carga.</a:t>
-            </a:r>
-          </a:p>
-          <a:p>
-            <a:pPr>
-              <a:spcAft>
-                <a:spcPts val="600"/>
-              </a:spcAft>
-            </a:pPr>
-            <a:r>
-              <a:rPr sz="1500">
-                <a:solidFill>
-                  <a:srgbClr val="22282E"/>
-                </a:solidFill>
-              </a:rPr>
-              <a:t>•  WireGuard: VPN moderna en el kernel Linux; usa criptografía fija y opinada (Curve25519, ChaCha20-Poly1305, BLAKE2s) y config mínima. Muy rápida.</a:t>
-            </a:r>
-          </a:p>
-          <a:p>
-            <a:pPr>
-              <a:spcAft>
-                <a:spcPts val="600"/>
-              </a:spcAft>
-            </a:pPr>
-            <a:r>
-              <a:rPr sz="1500">
-                <a:solidFill>
-                  <a:srgbClr val="22282E"/>
-                </a:solidFill>
-              </a:rPr>
-              <a:t>•  OpenVPN: VPN en espacio de usuario sobre TLS; muy flexible (TCP/UDP, certificados, usuario/clave) y ampliamente soportada.</a:t>
-            </a:r>
-          </a:p>
-          <a:p>
-            <a:pPr>
-              <a:spcAft>
-                <a:spcPts val="600"/>
-              </a:spcAft>
-            </a:pPr>
-            <a:r>
-              <a:rPr sz="1500">
-                <a:solidFill>
-                  <a:srgbClr val="22282E"/>
-                </a:solidFill>
-              </a:rPr>
-              <a:t>•  IPsec: conjunto de protocolos (IKE para negociar claves, ESP para cifrar) estandarizado en RFC 4301; base de la mayoría de VPN site-to-site empresariales.</a:t>
-            </a:r>
-          </a:p>
-          <a:p>
-            <a:pPr>
-              <a:spcAft>
-                <a:spcPts val="600"/>
-              </a:spcAft>
-            </a:pPr>
-            <a:r>
-              <a:rPr sz="1500">
-                <a:solidFill>
-                  <a:srgbClr val="22282E"/>
-                </a:solidFill>
-              </a:rPr>
-              <a:t>•  AllowedIPs (WireGuard): define qué rangos se enrutan por el túnel y qué IP de origen se aceptan del peer; determina el "split tunnel".</a:t>
-            </a:r>
-          </a:p>
-          <a:p>
-            <a:pPr>
-              <a:spcAft>
-                <a:spcPts val="600"/>
-              </a:spcAft>
-            </a:pPr>
-            <a:r>
-              <a:rPr sz="1500">
-                <a:solidFill>
-                  <a:srgbClr val="22282E"/>
-                </a:solidFill>
-              </a:rPr>
-              <a:t>•  PFS (Perfect Forward Secrecy): propiedad por la que comprometer una clave no revela sesiones pasadas; aportada por el intercambio efímero de claves.</a:t>
+              <a:t>•  La idea que sostiene toda VPN es la encapsulación: coger un paquete IP completo,</a:t>
+            </a:r>
+          </a:p>
+          <a:p>
+            <a:pPr>
+              <a:spcAft>
+                <a:spcPts val="600"/>
+              </a:spcAft>
+            </a:pPr>
+            <a:r>
+              <a:rPr sz="1500">
+                <a:solidFill>
+                  <a:srgbClr val="22282E"/>
+                </a:solidFill>
+              </a:rPr>
+              <a:t>•  cifrarlo, y meterlo como carga útil dentro de otro paquete IP que viaja por la red</a:t>
+            </a:r>
+          </a:p>
+          <a:p>
+            <a:pPr>
+              <a:spcAft>
+                <a:spcPts val="600"/>
+              </a:spcAft>
+            </a:pPr>
+            <a:r>
+              <a:rPr sz="1500">
+                <a:solidFill>
+                  <a:srgbClr val="22282E"/>
+                </a:solidFill>
+              </a:rPr>
+              <a:t>•  pública. El paquete exterior lleva las direcciones de los dos extremos del túnel y no</a:t>
+            </a:r>
+          </a:p>
+          <a:p>
+            <a:pPr>
+              <a:spcAft>
+                <a:spcPts val="600"/>
+              </a:spcAft>
+            </a:pPr>
+            <a:r>
+              <a:rPr sz="1500">
+                <a:solidFill>
+                  <a:srgbClr val="22282E"/>
+                </a:solidFill>
+              </a:rPr>
+              <a:t>•  revela nada de lo que transporta; el interior, con las direcciones reales de origen y</a:t>
+            </a:r>
+          </a:p>
+          <a:p>
+            <a:pPr>
+              <a:spcAft>
+                <a:spcPts val="600"/>
+              </a:spcAft>
+            </a:pPr>
+            <a:r>
+              <a:rPr sz="1500">
+                <a:solidFill>
+                  <a:srgbClr val="22282E"/>
+                </a:solidFill>
+              </a:rPr>
+              <a:t>•  destino, viaja protegido. Cuando el paquete llega al otro extremo, se descifra y se</a:t>
+            </a:r>
+          </a:p>
+          <a:p>
+            <a:pPr>
+              <a:spcAft>
+                <a:spcPts val="600"/>
+              </a:spcAft>
+            </a:pPr>
+            <a:r>
+              <a:rPr sz="1500">
+                <a:solidFill>
+                  <a:srgbClr val="22282E"/>
+                </a:solidFill>
+              </a:rPr>
+              <a:t>•  reinyecta como si hubiera nacido en esa red. Eso es lo que crea la ilusión de que dos</a:t>
+            </a:r>
+          </a:p>
+          <a:p>
+            <a:pPr>
+              <a:spcAft>
+                <a:spcPts val="600"/>
+              </a:spcAft>
+            </a:pPr>
+            <a:r>
+              <a:rPr sz="1500">
+                <a:solidFill>
+                  <a:srgbClr val="22282E"/>
+                </a:solidFill>
+              </a:rPr>
+              <a:t>•  redes separadas por Internet son una sola red privada.</a:t>
             </a:r>
           </a:p>
         </p:txBody>
@@ -4376,7 +4752,7 @@
                   <a:srgbClr val="0B3D2E"/>
                 </a:solidFill>
               </a:rPr>
-              <a:t>🧰 Herramientas y preparación</a:t>
+              <a:t>📖 Definiciones y características</a:t>
             </a:r>
           </a:p>
         </p:txBody>
@@ -4414,52 +4790,82 @@
                   <a:srgbClr val="22282E"/>
                 </a:solidFill>
               </a:rPr>
-              <a:t>•  WireGuard: sudo apt install wireguard.</a:t>
-            </a:r>
-          </a:p>
-          <a:p>
-            <a:pPr>
-              <a:spcAft>
-                <a:spcPts val="600"/>
-              </a:spcAft>
-            </a:pPr>
-            <a:r>
-              <a:rPr sz="1500">
-                <a:solidFill>
-                  <a:srgbClr val="22282E"/>
-                </a:solidFill>
-              </a:rPr>
-              <a:t>•  OpenVPN + easy-rsa: sudo apt install openvpn easy-rsa.</a:t>
-            </a:r>
-          </a:p>
-          <a:p>
-            <a:pPr>
-              <a:spcAft>
-                <a:spcPts val="600"/>
-              </a:spcAft>
-            </a:pPr>
-            <a:r>
-              <a:rPr sz="1500">
-                <a:solidFill>
-                  <a:srgbClr val="22282E"/>
-                </a:solidFill>
-              </a:rPr>
-              <a:t>•  IPsec: strongswan (sudo apt install strongswan).</a:t>
-            </a:r>
-          </a:p>
-          <a:p>
-            <a:pPr>
-              <a:spcAft>
-                <a:spcPts val="600"/>
-              </a:spcAft>
-            </a:pPr>
-            <a:r>
-              <a:rPr sz="1500">
-                <a:solidFill>
-                  <a:srgbClr val="22282E"/>
-                </a:solidFill>
-              </a:rPr>
-              <a:t>•  Dos VMs de laboratorio en redes distintas (o una red que las separe) para probar el túnel.</a:t>
+              <a:t>•  Túnel: encapsulación de paquetes dentro de otros para atravesar una red intermedia, normalmente cifrando la carga.</a:t>
+            </a:r>
+          </a:p>
+          <a:p>
+            <a:pPr>
+              <a:spcAft>
+                <a:spcPts val="600"/>
+              </a:spcAft>
+            </a:pPr>
+            <a:r>
+              <a:rPr sz="1500">
+                <a:solidFill>
+                  <a:srgbClr val="22282E"/>
+                </a:solidFill>
+              </a:rPr>
+              <a:t>•  WireGuard: VPN moderna en el kernel Linux; usa criptografía fija y opinada (Curve25519, ChaCha20-Poly1305, BLAKE2s) y config mínima. Muy rápida.</a:t>
+            </a:r>
+          </a:p>
+          <a:p>
+            <a:pPr>
+              <a:spcAft>
+                <a:spcPts val="600"/>
+              </a:spcAft>
+            </a:pPr>
+            <a:r>
+              <a:rPr sz="1500">
+                <a:solidFill>
+                  <a:srgbClr val="22282E"/>
+                </a:solidFill>
+              </a:rPr>
+              <a:t>•  OpenVPN: VPN en espacio de usuario sobre TLS; muy flexible (TCP/UDP, certificados, usuario/clave) y ampliamente soportada.</a:t>
+            </a:r>
+          </a:p>
+          <a:p>
+            <a:pPr>
+              <a:spcAft>
+                <a:spcPts val="600"/>
+              </a:spcAft>
+            </a:pPr>
+            <a:r>
+              <a:rPr sz="1500">
+                <a:solidFill>
+                  <a:srgbClr val="22282E"/>
+                </a:solidFill>
+              </a:rPr>
+              <a:t>•  IPsec: conjunto de protocolos (IKE para negociar claves, ESP para cifrar) estandarizado en RFC 4301; base de la mayoría de VPN site-to-site empresariales.</a:t>
+            </a:r>
+          </a:p>
+          <a:p>
+            <a:pPr>
+              <a:spcAft>
+                <a:spcPts val="600"/>
+              </a:spcAft>
+            </a:pPr>
+            <a:r>
+              <a:rPr sz="1500">
+                <a:solidFill>
+                  <a:srgbClr val="22282E"/>
+                </a:solidFill>
+              </a:rPr>
+              <a:t>•  AllowedIPs (WireGuard): define qué rangos se enrutan por el túnel y qué IP de origen se aceptan del peer; determina el "split tunnel".</a:t>
+            </a:r>
+          </a:p>
+          <a:p>
+            <a:pPr>
+              <a:spcAft>
+                <a:spcPts val="600"/>
+              </a:spcAft>
+            </a:pPr>
+            <a:r>
+              <a:rPr sz="1500">
+                <a:solidFill>
+                  <a:srgbClr val="22282E"/>
+                </a:solidFill>
+              </a:rPr>
+              <a:t>•  PFS (Perfect Forward Secrecy): propiedad por la que comprometer una clave no revela sesiones pasadas; aportada por el intercambio efímero de claves.</a:t>
             </a:r>
           </a:p>
         </p:txBody>
@@ -4510,7 +4916,7 @@
                   <a:srgbClr val="0B3D2E"/>
                 </a:solidFill>
               </a:rPr>
-              <a:t>🧪 Laboratorio guiado — WireGuard</a:t>
+              <a:t>📔 Glosario</a:t>
             </a:r>
           </a:p>
         </p:txBody>
@@ -4548,97 +4954,97 @@
                   <a:srgbClr val="22282E"/>
                 </a:solidFill>
               </a:rPr>
-              <a:t>•  Genera claves en cada peer:</a:t>
-            </a:r>
-          </a:p>
-          <a:p>
-            <a:pPr>
-              <a:spcAft>
-                <a:spcPts val="600"/>
-              </a:spcAft>
-            </a:pPr>
-            <a:r>
-              <a:rPr sz="1500">
-                <a:solidFill>
-                  <a:srgbClr val="22282E"/>
-                </a:solidFill>
-              </a:rPr>
-              <a:t>•  wg genkey | tee privada.key | wg pubkey &gt; publica.key</a:t>
-            </a:r>
-          </a:p>
-          <a:p>
-            <a:pPr>
-              <a:spcAft>
-                <a:spcPts val="600"/>
-              </a:spcAft>
-            </a:pPr>
-            <a:r>
-              <a:rPr sz="1500">
-                <a:solidFill>
-                  <a:srgbClr val="22282E"/>
-                </a:solidFill>
-              </a:rPr>
-              <a:t>•  chmod 600 privada.key</a:t>
-            </a:r>
-          </a:p>
-          <a:p>
-            <a:pPr>
-              <a:spcAft>
-                <a:spcPts val="600"/>
-              </a:spcAft>
-            </a:pPr>
-            <a:r>
-              <a:rPr sz="1500">
-                <a:solidFill>
-                  <a:srgbClr val="22282E"/>
-                </a:solidFill>
-              </a:rPr>
-              <a:t>•  Configura el servidor /etc/wireguard/wg0.conf:</a:t>
-            </a:r>
-          </a:p>
-          <a:p>
-            <a:pPr>
-              <a:spcAft>
-                <a:spcPts val="600"/>
-              </a:spcAft>
-            </a:pPr>
-            <a:r>
-              <a:rPr sz="1500">
-                <a:solidFill>
-                  <a:srgbClr val="22282E"/>
-                </a:solidFill>
-              </a:rPr>
-              <a:t>•  [Interface]</a:t>
-            </a:r>
-          </a:p>
-          <a:p>
-            <a:pPr>
-              <a:spcAft>
-                <a:spcPts val="600"/>
-              </a:spcAft>
-            </a:pPr>
-            <a:r>
-              <a:rPr sz="1500">
-                <a:solidFill>
-                  <a:srgbClr val="22282E"/>
-                </a:solidFill>
-              </a:rPr>
-              <a:t>•  Address = 10.10.0.1/24</a:t>
-            </a:r>
-          </a:p>
-          <a:p>
-            <a:pPr>
-              <a:spcAft>
-                <a:spcPts val="600"/>
-              </a:spcAft>
-            </a:pPr>
-            <a:r>
-              <a:rPr sz="1500">
-                <a:solidFill>
-                  <a:srgbClr val="22282E"/>
-                </a:solidFill>
-              </a:rPr>
-              <a:t>•  ListenPort = 51820</a:t>
+              <a:t>•  Término — Definición concisa</a:t>
+            </a:r>
+          </a:p>
+          <a:p>
+            <a:pPr>
+              <a:spcAft>
+                <a:spcPts val="600"/>
+              </a:spcAft>
+            </a:pPr>
+            <a:r>
+              <a:rPr sz="1500">
+                <a:solidFill>
+                  <a:srgbClr val="22282E"/>
+                </a:solidFill>
+              </a:rPr>
+              <a:t>•  VPN — Red privada extendida sobre una infraestructura pública mediante cifrado</a:t>
+            </a:r>
+          </a:p>
+          <a:p>
+            <a:pPr>
+              <a:spcAft>
+                <a:spcPts val="600"/>
+              </a:spcAft>
+            </a:pPr>
+            <a:r>
+              <a:rPr sz="1500">
+                <a:solidFill>
+                  <a:srgbClr val="22282E"/>
+                </a:solidFill>
+              </a:rPr>
+              <a:t>•  Túnel — Encapsulación de un paquete dentro de otro para atravesar una red</a:t>
+            </a:r>
+          </a:p>
+          <a:p>
+            <a:pPr>
+              <a:spcAft>
+                <a:spcPts val="600"/>
+              </a:spcAft>
+            </a:pPr>
+            <a:r>
+              <a:rPr sz="1500">
+                <a:solidFill>
+                  <a:srgbClr val="22282E"/>
+                </a:solidFill>
+              </a:rPr>
+              <a:t>•  Acceso remoto — Túnel de un usuario individual hacia la red de la organización</a:t>
+            </a:r>
+          </a:p>
+          <a:p>
+            <a:pPr>
+              <a:spcAft>
+                <a:spcPts val="600"/>
+              </a:spcAft>
+            </a:pPr>
+            <a:r>
+              <a:rPr sz="1500">
+                <a:solidFill>
+                  <a:srgbClr val="22282E"/>
+                </a:solidFill>
+              </a:rPr>
+              <a:t>•  Site-to-site — Túnel entre dos redes completas, gateway a gateway</a:t>
+            </a:r>
+          </a:p>
+          <a:p>
+            <a:pPr>
+              <a:spcAft>
+                <a:spcPts val="600"/>
+              </a:spcAft>
+            </a:pPr>
+            <a:r>
+              <a:rPr sz="1500">
+                <a:solidFill>
+                  <a:srgbClr val="22282E"/>
+                </a:solidFill>
+              </a:rPr>
+              <a:t>•  WireGuard — VPN moderna en kernel, con criptografía fija y configuración mínima</a:t>
+            </a:r>
+          </a:p>
+          <a:p>
+            <a:pPr>
+              <a:spcAft>
+                <a:spcPts val="600"/>
+              </a:spcAft>
+            </a:pPr>
+            <a:r>
+              <a:rPr sz="1500">
+                <a:solidFill>
+                  <a:srgbClr val="22282E"/>
+                </a:solidFill>
+              </a:rPr>
+              <a:t>•  AllowedIPs — En WireGuard, destinos enrutados y orígenes aceptados por par</a:t>
             </a:r>
           </a:p>
         </p:txBody>
@@ -4689,7 +5095,7 @@
                   <a:srgbClr val="0B3D2E"/>
                 </a:solidFill>
               </a:rPr>
-              <a:t>🧪 Laboratorio guiado — OpenVPN e IPsec</a:t>
+              <a:t>🧰 Herramientas y preparación</a:t>
             </a:r>
           </a:p>
         </p:txBody>
@@ -4727,97 +5133,52 @@
                   <a:srgbClr val="22282E"/>
                 </a:solidFill>
               </a:rPr>
-              <a:t>•  OpenVPN — PKI mínima con easy-rsa:</a:t>
-            </a:r>
-          </a:p>
-          <a:p>
-            <a:pPr>
-              <a:spcAft>
-                <a:spcPts val="600"/>
-              </a:spcAft>
-            </a:pPr>
-            <a:r>
-              <a:rPr sz="1500">
-                <a:solidFill>
-                  <a:srgbClr val="22282E"/>
-                </a:solidFill>
-              </a:rPr>
-              <a:t>•  make-cadir ~/ca &amp;&amp; cd ~/ca</a:t>
-            </a:r>
-          </a:p>
-          <a:p>
-            <a:pPr>
-              <a:spcAft>
-                <a:spcPts val="600"/>
-              </a:spcAft>
-            </a:pPr>
-            <a:r>
-              <a:rPr sz="1500">
-                <a:solidFill>
-                  <a:srgbClr val="22282E"/>
-                </a:solidFill>
-              </a:rPr>
-              <a:t>•  ./easyrsa init-pki &amp;&amp; ./easyrsa build-ca nopass</a:t>
-            </a:r>
-          </a:p>
-          <a:p>
-            <a:pPr>
-              <a:spcAft>
-                <a:spcPts val="600"/>
-              </a:spcAft>
-            </a:pPr>
-            <a:r>
-              <a:rPr sz="1500">
-                <a:solidFill>
-                  <a:srgbClr val="22282E"/>
-                </a:solidFill>
-              </a:rPr>
-              <a:t>•  ./easyrsa build-server-full servidor nopass</a:t>
-            </a:r>
-          </a:p>
-          <a:p>
-            <a:pPr>
-              <a:spcAft>
-                <a:spcPts val="600"/>
-              </a:spcAft>
-            </a:pPr>
-            <a:r>
-              <a:rPr sz="1500">
-                <a:solidFill>
-                  <a:srgbClr val="22282E"/>
-                </a:solidFill>
-              </a:rPr>
-              <a:t>•  ./easyrsa build-client-full cliente1 nopass</a:t>
-            </a:r>
-          </a:p>
-          <a:p>
-            <a:pPr>
-              <a:spcAft>
-                <a:spcPts val="600"/>
-              </a:spcAft>
-            </a:pPr>
-            <a:r>
-              <a:rPr sz="1500">
-                <a:solidFill>
-                  <a:srgbClr val="22282E"/>
-                </a:solidFill>
-              </a:rPr>
-              <a:t>•  Configura server.conf (puerto 1194/udp, dev tun, cifrado AES-GCM) y arranca sudo openvpn --config server.conf.</a:t>
-            </a:r>
-          </a:p>
-          <a:p>
-            <a:pPr>
-              <a:spcAft>
-                <a:spcPts val="600"/>
-              </a:spcAft>
-            </a:pPr>
-            <a:r>
-              <a:rPr sz="1500">
-                <a:solidFill>
-                  <a:srgbClr val="22282E"/>
-                </a:solidFill>
-              </a:rPr>
-              <a:t>•  IPsec con strongSwan (site-to-site, esquema): edita /etc/ipsec.conf con ikev2, esp=aes256-sha256, define leftsubnet/rightsubnet, y levanta con sudo ipsec up &lt;conexion&gt;.</a:t>
+              <a:t>•  WireGuard: sudo apt install wireguard.</a:t>
+            </a:r>
+          </a:p>
+          <a:p>
+            <a:pPr>
+              <a:spcAft>
+                <a:spcPts val="600"/>
+              </a:spcAft>
+            </a:pPr>
+            <a:r>
+              <a:rPr sz="1500">
+                <a:solidFill>
+                  <a:srgbClr val="22282E"/>
+                </a:solidFill>
+              </a:rPr>
+              <a:t>•  OpenVPN + easy-rsa: sudo apt install openvpn easy-rsa.</a:t>
+            </a:r>
+          </a:p>
+          <a:p>
+            <a:pPr>
+              <a:spcAft>
+                <a:spcPts val="600"/>
+              </a:spcAft>
+            </a:pPr>
+            <a:r>
+              <a:rPr sz="1500">
+                <a:solidFill>
+                  <a:srgbClr val="22282E"/>
+                </a:solidFill>
+              </a:rPr>
+              <a:t>•  IPsec: strongswan (sudo apt install strongswan).</a:t>
+            </a:r>
+          </a:p>
+          <a:p>
+            <a:pPr>
+              <a:spcAft>
+                <a:spcPts val="600"/>
+              </a:spcAft>
+            </a:pPr>
+            <a:r>
+              <a:rPr sz="1500">
+                <a:solidFill>
+                  <a:srgbClr val="22282E"/>
+                </a:solidFill>
+              </a:rPr>
+              <a:t>•  Dos VMs de laboratorio en redes distintas (o una red que las separe) para probar el túnel.</a:t>
             </a:r>
           </a:p>
         </p:txBody>
@@ -4868,7 +5229,7 @@
                   <a:srgbClr val="0B3D2E"/>
                 </a:solidFill>
               </a:rPr>
-              <a:t>✍️ Ejercicios</a:t>
+              <a:t>🧪 Laboratorio guiado — WireGuard</a:t>
             </a:r>
           </a:p>
         </p:txBody>
@@ -4906,82 +5267,67 @@
                   <a:srgbClr val="22282E"/>
                 </a:solidFill>
               </a:rPr>
-              <a:t>•  Monta un túnel WireGuard entre dos VMs y demuestra con tcpdump que el tráfico interno viaja cifrado.</a:t>
-            </a:r>
-          </a:p>
-          <a:p>
-            <a:pPr>
-              <a:spcAft>
-                <a:spcPts val="600"/>
-              </a:spcAft>
-            </a:pPr>
-            <a:r>
-              <a:rPr sz="1500">
-                <a:solidFill>
-                  <a:srgbClr val="22282E"/>
-                </a:solidFill>
-              </a:rPr>
-              <a:t>•  Configura split tunnel en WireGuard para que solo una subred concreta pase por la VPN.</a:t>
-            </a:r>
-          </a:p>
-          <a:p>
-            <a:pPr>
-              <a:spcAft>
-                <a:spcPts val="600"/>
-              </a:spcAft>
-            </a:pPr>
-            <a:r>
-              <a:rPr sz="1500">
-                <a:solidFill>
-                  <a:srgbClr val="22282E"/>
-                </a:solidFill>
-              </a:rPr>
-              <a:t>•  Con OpenVPN, revoca un certificado de cliente y verifica que ya no puede conectar (CRL).</a:t>
-            </a:r>
-          </a:p>
-          <a:p>
-            <a:pPr>
-              <a:spcAft>
-                <a:spcPts val="600"/>
-              </a:spcAft>
-            </a:pPr>
-            <a:r>
-              <a:rPr sz="1500">
-                <a:solidFill>
-                  <a:srgbClr val="22282E"/>
-                </a:solidFill>
-              </a:rPr>
-              <a:t>•  Compara el tamaño de la configuración y el handshake de WireGuard vs. OpenVPN.</a:t>
-            </a:r>
-          </a:p>
-          <a:p>
-            <a:pPr>
-              <a:spcAft>
-                <a:spcPts val="600"/>
-              </a:spcAft>
-            </a:pPr>
-            <a:r>
-              <a:rPr sz="1500">
-                <a:solidFill>
-                  <a:srgbClr val="22282E"/>
-                </a:solidFill>
-              </a:rPr>
-              <a:t>•  Explica, capturando con Wireshark, las fases IKE de una negociación IPsec.</a:t>
-            </a:r>
-          </a:p>
-          <a:p>
-            <a:pPr>
-              <a:spcAft>
-                <a:spcPts val="600"/>
-              </a:spcAft>
-            </a:pPr>
-            <a:r>
-              <a:rPr sz="1500">
-                <a:solidFill>
-                  <a:srgbClr val="22282E"/>
-                </a:solidFill>
-              </a:rPr>
-              <a:t>•  Aplica un firewall (clase 034) que solo permita el puerto de la VPN y bloquee el resto.</a:t>
+              <a:t>•  Genera claves en cada peer:</a:t>
+            </a:r>
+          </a:p>
+          <a:p>
+            <a:pPr>
+              <a:spcAft>
+                <a:spcPts val="600"/>
+              </a:spcAft>
+            </a:pPr>
+            <a:r>
+              <a:rPr sz="1500">
+                <a:solidFill>
+                  <a:srgbClr val="22282E"/>
+                </a:solidFill>
+              </a:rPr>
+              <a:t>•  Configura el servidor /etc/wireguard/wg0.conf:</a:t>
+            </a:r>
+          </a:p>
+          <a:p>
+            <a:pPr>
+              <a:spcAft>
+                <a:spcPts val="600"/>
+              </a:spcAft>
+            </a:pPr>
+            <a:r>
+              <a:rPr sz="1500">
+                <a:solidFill>
+                  <a:srgbClr val="22282E"/>
+                </a:solidFill>
+              </a:rPr>
+              <a:t>•  Configura el cliente análogamente con AllowedIPs = 10.10.0.0/24 y Endpoint = &lt;ip-servidor&gt;:51820.</a:t>
+            </a:r>
+          </a:p>
+          <a:p>
+            <a:pPr>
+              <a:spcAft>
+                <a:spcPts val="600"/>
+              </a:spcAft>
+            </a:pPr>
+            <a:r>
+              <a:rPr sz="1500">
+                <a:solidFill>
+                  <a:srgbClr val="22282E"/>
+                </a:solidFill>
+              </a:rPr>
+              <a:t>•  Levanta el túnel en ambos y verifica:</a:t>
+            </a:r>
+          </a:p>
+          <a:p>
+            <a:pPr>
+              <a:spcAft>
+                <a:spcPts val="600"/>
+              </a:spcAft>
+            </a:pPr>
+            <a:r>
+              <a:rPr sz="1500">
+                <a:solidFill>
+                  <a:srgbClr val="22282E"/>
+                </a:solidFill>
+              </a:rPr>
+              <a:t>•  Confirma que cifra: captura en la interfaz física y verifica que ves UDP/51820 con payload cifrado (ESP-like), no el ICMP en claro:</a:t>
             </a:r>
           </a:p>
         </p:txBody>
